--- a/SIHPPT1.pptx
+++ b/SIHPPT1.pptx
@@ -6200,7 +6200,7 @@
                 </a:solidFill>
                 <a:latin typeface="Arial"/>
               </a:rPr>
-              <a:t>53,000+ fares collected · 15 city pairs × 5 lead times · every 10 minutes · ₹0 a month to run</a:t>
+              <a:t>158,000+ fares collected · 15 city pairs × 5 lead times · every 10 minutes · ₹0 a month to run</a:t>
             </a:r>
           </a:p>
         </p:txBody>

--- a/SIHPPT1.pptx
+++ b/SIHPPT1.pptx
@@ -7463,7 +7463,7 @@
                 </a:solidFill>
                 <a:latin typeface="Arial"/>
               </a:rPr>
-              <a:t>route seat share × lead-time share</a:t>
+              <a:t>seat share (passenger proxy) × lead time</a:t>
             </a:r>
           </a:p>
         </p:txBody>
@@ -7553,7 +7553,7 @@
                 </a:solidFill>
                 <a:latin typeface="Arial"/>
               </a:rPr>
-              <a:t>first observation day = 100</a:t>
+              <a:t>first 3 full-coverage days, averaged = 100</a:t>
             </a:r>
           </a:p>
         </p:txBody>

--- a/SIHPPT1.pptx
+++ b/SIHPPT1.pptx
@@ -6200,7 +6200,7 @@
                 </a:solidFill>
                 <a:latin typeface="Arial"/>
               </a:rPr>
-              <a:t>158,000+ fares collected · 15 city pairs × 5 lead times · every 10 minutes · ₹0 a month to run</a:t>
+              <a:t>209,000+ fares · 15 city pairs × 5 lead times · every 10 minutes · scraped, then a licensed feed · ₹0 a month</a:t>
             </a:r>
           </a:p>
         </p:txBody>
@@ -6305,7 +6305,7 @@
         <p:spPr>
           <a:xfrm>
             <a:off x="2148840" y="2331720"/>
-            <a:ext cx="1920240" cy="256032"/>
+            <a:ext cx="1920240" cy="237744"/>
           </a:xfrm>
           <a:prstGeom prst="rect">
             <a:avLst/>
@@ -6313,7 +6313,7 @@
           <a:noFill/>
         </p:spPr>
         <p:txBody>
-          <a:bodyPr wrap="none" lIns="36576" rIns="36576" tIns="18288" bIns="18288">
+          <a:bodyPr wrap="square" lIns="36576" rIns="36576" tIns="18288" bIns="18288">
             <a:spAutoFit/>
           </a:bodyPr>
           <a:lstStyle/>
@@ -6330,7 +6330,7 @@
               </a:spcAft>
             </a:pPr>
             <a:r>
-              <a:rPr sz="1400" b="1">
+              <a:rPr sz="1100" b="1">
                 <a:solidFill>
                   <a:srgbClr val="5A626C"/>
                 </a:solidFill>
@@ -6350,7 +6350,7 @@
         <p:spPr>
           <a:xfrm>
             <a:off x="4160520" y="2331720"/>
-            <a:ext cx="2468880" cy="256032"/>
+            <a:ext cx="2468880" cy="237744"/>
           </a:xfrm>
           <a:prstGeom prst="rect">
             <a:avLst/>
@@ -6358,7 +6358,7 @@
           <a:noFill/>
         </p:spPr>
         <p:txBody>
-          <a:bodyPr wrap="none" lIns="36576" rIns="36576" tIns="18288" bIns="18288">
+          <a:bodyPr wrap="square" lIns="36576" rIns="36576" tIns="18288" bIns="18288">
             <a:spAutoFit/>
           </a:bodyPr>
           <a:lstStyle/>
@@ -6375,7 +6375,7 @@
               </a:spcAft>
             </a:pPr>
             <a:r>
-              <a:rPr sz="1400" b="1">
+              <a:rPr sz="1100" b="1">
                 <a:solidFill>
                   <a:srgbClr val="1B8A5A"/>
                 </a:solidFill>
@@ -6395,7 +6395,7 @@
         <p:spPr>
           <a:xfrm>
             <a:off x="548640" y="2633472"/>
-            <a:ext cx="1600200" cy="274320"/>
+            <a:ext cx="1600200" cy="237744"/>
           </a:xfrm>
           <a:prstGeom prst="rect">
             <a:avLst/>
@@ -6403,7 +6403,7 @@
           <a:noFill/>
         </p:spPr>
         <p:txBody>
-          <a:bodyPr wrap="none" lIns="36576" rIns="36576" tIns="18288" bIns="18288">
+          <a:bodyPr wrap="square" lIns="36576" rIns="36576" tIns="18288" bIns="18288">
             <a:spAutoFit/>
           </a:bodyPr>
           <a:lstStyle/>
@@ -6420,7 +6420,7 @@
               </a:spcAft>
             </a:pPr>
             <a:r>
-              <a:rPr sz="1600" b="1">
+              <a:rPr sz="1100" b="1">
                 <a:solidFill>
                   <a:srgbClr val="262B33"/>
                 </a:solidFill>
@@ -6440,7 +6440,7 @@
         <p:spPr>
           <a:xfrm>
             <a:off x="2148840" y="2633472"/>
-            <a:ext cx="2011680" cy="274320"/>
+            <a:ext cx="1920240" cy="237744"/>
           </a:xfrm>
           <a:prstGeom prst="rect">
             <a:avLst/>
@@ -6448,7 +6448,7 @@
           <a:noFill/>
         </p:spPr>
         <p:txBody>
-          <a:bodyPr wrap="none" lIns="36576" rIns="36576" tIns="18288" bIns="18288">
+          <a:bodyPr wrap="square" lIns="36576" rIns="36576" tIns="18288" bIns="18288">
             <a:spAutoFit/>
           </a:bodyPr>
           <a:lstStyle/>
@@ -6465,7 +6465,7 @@
               </a:spcAft>
             </a:pPr>
             <a:r>
-              <a:rPr sz="1400" b="1">
+              <a:rPr sz="1050" b="0">
                 <a:solidFill>
                   <a:srgbClr val="5A626C"/>
                 </a:solidFill>
@@ -6485,7 +6485,7 @@
         <p:spPr>
           <a:xfrm>
             <a:off x="4160520" y="2633472"/>
-            <a:ext cx="2560320" cy="274320"/>
+            <a:ext cx="2468880" cy="237744"/>
           </a:xfrm>
           <a:prstGeom prst="rect">
             <a:avLst/>
@@ -6493,7 +6493,7 @@
           <a:noFill/>
         </p:spPr>
         <p:txBody>
-          <a:bodyPr wrap="none" lIns="36576" rIns="36576" tIns="18288" bIns="18288">
+          <a:bodyPr wrap="square" lIns="36576" rIns="36576" tIns="18288" bIns="18288">
             <a:spAutoFit/>
           </a:bodyPr>
           <a:lstStyle/>
@@ -6510,7 +6510,7 @@
               </a:spcAft>
             </a:pPr>
             <a:r>
-              <a:rPr sz="1400" b="1">
+              <a:rPr sz="1050" b="1">
                 <a:solidFill>
                   <a:srgbClr val="262B33"/>
                 </a:solidFill>
@@ -6530,7 +6530,7 @@
         <p:spPr>
           <a:xfrm>
             <a:off x="548640" y="2916936"/>
-            <a:ext cx="1600200" cy="274320"/>
+            <a:ext cx="1600200" cy="237744"/>
           </a:xfrm>
           <a:prstGeom prst="rect">
             <a:avLst/>
@@ -6538,7 +6538,7 @@
           <a:noFill/>
         </p:spPr>
         <p:txBody>
-          <a:bodyPr wrap="none" lIns="36576" rIns="36576" tIns="18288" bIns="18288">
+          <a:bodyPr wrap="square" lIns="36576" rIns="36576" tIns="18288" bIns="18288">
             <a:spAutoFit/>
           </a:bodyPr>
           <a:lstStyle/>
@@ -6555,7 +6555,7 @@
               </a:spcAft>
             </a:pPr>
             <a:r>
-              <a:rPr sz="1600" b="1">
+              <a:rPr sz="1100" b="1">
                 <a:solidFill>
                   <a:srgbClr val="262B33"/>
                 </a:solidFill>
@@ -6575,7 +6575,7 @@
         <p:spPr>
           <a:xfrm>
             <a:off x="2148840" y="2916936"/>
-            <a:ext cx="2011680" cy="274320"/>
+            <a:ext cx="1920240" cy="237744"/>
           </a:xfrm>
           <a:prstGeom prst="rect">
             <a:avLst/>
@@ -6583,7 +6583,7 @@
           <a:noFill/>
         </p:spPr>
         <p:txBody>
-          <a:bodyPr wrap="none" lIns="36576" rIns="36576" tIns="18288" bIns="18288">
+          <a:bodyPr wrap="square" lIns="36576" rIns="36576" tIns="18288" bIns="18288">
             <a:spAutoFit/>
           </a:bodyPr>
           <a:lstStyle/>
@@ -6600,7 +6600,7 @@
               </a:spcAft>
             </a:pPr>
             <a:r>
-              <a:rPr sz="1400" b="1">
+              <a:rPr sz="1050" b="0">
                 <a:solidFill>
                   <a:srgbClr val="5A626C"/>
                 </a:solidFill>
@@ -6620,7 +6620,7 @@
         <p:spPr>
           <a:xfrm>
             <a:off x="4160520" y="2916936"/>
-            <a:ext cx="2560320" cy="274320"/>
+            <a:ext cx="2468880" cy="237744"/>
           </a:xfrm>
           <a:prstGeom prst="rect">
             <a:avLst/>
@@ -6628,7 +6628,7 @@
           <a:noFill/>
         </p:spPr>
         <p:txBody>
-          <a:bodyPr wrap="none" lIns="36576" rIns="36576" tIns="18288" bIns="18288">
+          <a:bodyPr wrap="square" lIns="36576" rIns="36576" tIns="18288" bIns="18288">
             <a:spAutoFit/>
           </a:bodyPr>
           <a:lstStyle/>
@@ -6645,7 +6645,7 @@
               </a:spcAft>
             </a:pPr>
             <a:r>
-              <a:rPr sz="1400" b="1">
+              <a:rPr sz="1050" b="1">
                 <a:solidFill>
                   <a:srgbClr val="262B33"/>
                 </a:solidFill>
@@ -6665,7 +6665,7 @@
         <p:spPr>
           <a:xfrm>
             <a:off x="548640" y="3200400"/>
-            <a:ext cx="1600200" cy="274320"/>
+            <a:ext cx="1600200" cy="237744"/>
           </a:xfrm>
           <a:prstGeom prst="rect">
             <a:avLst/>
@@ -6673,7 +6673,7 @@
           <a:noFill/>
         </p:spPr>
         <p:txBody>
-          <a:bodyPr wrap="none" lIns="36576" rIns="36576" tIns="18288" bIns="18288">
+          <a:bodyPr wrap="square" lIns="36576" rIns="36576" tIns="18288" bIns="18288">
             <a:spAutoFit/>
           </a:bodyPr>
           <a:lstStyle/>
@@ -6690,7 +6690,7 @@
               </a:spcAft>
             </a:pPr>
             <a:r>
-              <a:rPr sz="1600" b="1">
+              <a:rPr sz="1100" b="1">
                 <a:solidFill>
                   <a:srgbClr val="262B33"/>
                 </a:solidFill>
@@ -6710,7 +6710,7 @@
         <p:spPr>
           <a:xfrm>
             <a:off x="2148840" y="3200400"/>
-            <a:ext cx="2011680" cy="274320"/>
+            <a:ext cx="1920240" cy="237744"/>
           </a:xfrm>
           <a:prstGeom prst="rect">
             <a:avLst/>
@@ -6718,7 +6718,7 @@
           <a:noFill/>
         </p:spPr>
         <p:txBody>
-          <a:bodyPr wrap="none" lIns="36576" rIns="36576" tIns="18288" bIns="18288">
+          <a:bodyPr wrap="square" lIns="36576" rIns="36576" tIns="18288" bIns="18288">
             <a:spAutoFit/>
           </a:bodyPr>
           <a:lstStyle/>
@@ -6735,7 +6735,7 @@
               </a:spcAft>
             </a:pPr>
             <a:r>
-              <a:rPr sz="1400" b="1">
+              <a:rPr sz="1050" b="0">
                 <a:solidFill>
                   <a:srgbClr val="5A626C"/>
                 </a:solidFill>
@@ -6755,7 +6755,7 @@
         <p:spPr>
           <a:xfrm>
             <a:off x="4160520" y="3200400"/>
-            <a:ext cx="2560320" cy="274320"/>
+            <a:ext cx="2468880" cy="237744"/>
           </a:xfrm>
           <a:prstGeom prst="rect">
             <a:avLst/>
@@ -6763,7 +6763,7 @@
           <a:noFill/>
         </p:spPr>
         <p:txBody>
-          <a:bodyPr wrap="none" lIns="36576" rIns="36576" tIns="18288" bIns="18288">
+          <a:bodyPr wrap="square" lIns="36576" rIns="36576" tIns="18288" bIns="18288">
             <a:spAutoFit/>
           </a:bodyPr>
           <a:lstStyle/>
@@ -6780,7 +6780,7 @@
               </a:spcAft>
             </a:pPr>
             <a:r>
-              <a:rPr sz="1400" b="1">
+              <a:rPr sz="1050" b="1">
                 <a:solidFill>
                   <a:srgbClr val="262B33"/>
                 </a:solidFill>
@@ -6800,7 +6800,7 @@
         <p:spPr>
           <a:xfrm>
             <a:off x="548640" y="3483863"/>
-            <a:ext cx="1600200" cy="274320"/>
+            <a:ext cx="1600200" cy="237744"/>
           </a:xfrm>
           <a:prstGeom prst="rect">
             <a:avLst/>
@@ -6808,7 +6808,7 @@
           <a:noFill/>
         </p:spPr>
         <p:txBody>
-          <a:bodyPr wrap="none" lIns="36576" rIns="36576" tIns="18288" bIns="18288">
+          <a:bodyPr wrap="square" lIns="36576" rIns="36576" tIns="18288" bIns="18288">
             <a:spAutoFit/>
           </a:bodyPr>
           <a:lstStyle/>
@@ -6825,7 +6825,7 @@
               </a:spcAft>
             </a:pPr>
             <a:r>
-              <a:rPr sz="1600" b="1">
+              <a:rPr sz="1100" b="1">
                 <a:solidFill>
                   <a:srgbClr val="262B33"/>
                 </a:solidFill>
@@ -6845,7 +6845,7 @@
         <p:spPr>
           <a:xfrm>
             <a:off x="2148840" y="3483863"/>
-            <a:ext cx="2011680" cy="274320"/>
+            <a:ext cx="1920240" cy="237744"/>
           </a:xfrm>
           <a:prstGeom prst="rect">
             <a:avLst/>
@@ -6853,7 +6853,7 @@
           <a:noFill/>
         </p:spPr>
         <p:txBody>
-          <a:bodyPr wrap="none" lIns="36576" rIns="36576" tIns="18288" bIns="18288">
+          <a:bodyPr wrap="square" lIns="36576" rIns="36576" tIns="18288" bIns="18288">
             <a:spAutoFit/>
           </a:bodyPr>
           <a:lstStyle/>
@@ -6870,7 +6870,7 @@
               </a:spcAft>
             </a:pPr>
             <a:r>
-              <a:rPr sz="1400" b="1">
+              <a:rPr sz="1050" b="0">
                 <a:solidFill>
                   <a:srgbClr val="5A626C"/>
                 </a:solidFill>
@@ -6890,7 +6890,7 @@
         <p:spPr>
           <a:xfrm>
             <a:off x="4160520" y="3483863"/>
-            <a:ext cx="2560320" cy="274320"/>
+            <a:ext cx="2468880" cy="237744"/>
           </a:xfrm>
           <a:prstGeom prst="rect">
             <a:avLst/>
@@ -6898,7 +6898,7 @@
           <a:noFill/>
         </p:spPr>
         <p:txBody>
-          <a:bodyPr wrap="none" lIns="36576" rIns="36576" tIns="18288" bIns="18288">
+          <a:bodyPr wrap="square" lIns="36576" rIns="36576" tIns="18288" bIns="18288">
             <a:spAutoFit/>
           </a:bodyPr>
           <a:lstStyle/>
@@ -6915,7 +6915,7 @@
               </a:spcAft>
             </a:pPr>
             <a:r>
-              <a:rPr sz="1400" b="1">
+              <a:rPr sz="1050" b="1">
                 <a:solidFill>
                   <a:srgbClr val="262B33"/>
                 </a:solidFill>
@@ -7686,7 +7686,7 @@
           </a:fontRef>
         </p:style>
         <p:txBody>
-          <a:bodyPr rtlCol="0" anchor="t" wrap="square" lIns="109728" rIns="109728" tIns="128016" bIns="18288"/>
+          <a:bodyPr rtlCol="0" anchor="ctr" wrap="square" lIns="36576" rIns="36576" tIns="128016" bIns="18288"/>
           <a:lstStyle/>
           <a:p>
             <a:pPr algn="ctr">
@@ -7701,7 +7701,7 @@
               </a:spcAft>
             </a:pPr>
             <a:r>
-              <a:rPr sz="1600" b="1">
+              <a:rPr sz="1200" b="1">
                 <a:solidFill>
                   <a:srgbClr val="4F81BD"/>
                 </a:solidFill>
@@ -7711,19 +7711,19 @@
             </a:r>
           </a:p>
           <a:p>
-            <a:pPr algn="ctr">
+            <a:pPr>
               <a:lnSpc>
                 <a:spcPct val="95000"/>
               </a:lnSpc>
               <a:spcBef>
-                <a:spcPts val="800"/>
-              </a:spcBef>
-              <a:spcAft>
-                <a:spcPts val="0"/>
-              </a:spcAft>
-            </a:pPr>
-            <a:r>
-              <a:rPr sz="1200" b="1">
+                <a:spcPts val="500"/>
+              </a:spcBef>
+              <a:spcAft>
+                <a:spcPts val="0"/>
+              </a:spcAft>
+            </a:pPr>
+            <a:r>
+              <a:rPr sz="1050" b="0">
                 <a:solidFill>
                   <a:srgbClr val="262B33"/>
                 </a:solidFill>
@@ -7817,7 +7817,7 @@
           </a:fontRef>
         </p:style>
         <p:txBody>
-          <a:bodyPr rtlCol="0" anchor="t" wrap="square" lIns="109728" rIns="109728" tIns="128016" bIns="18288"/>
+          <a:bodyPr rtlCol="0" anchor="ctr" wrap="square" lIns="36576" rIns="36576" tIns="128016" bIns="18288"/>
           <a:lstStyle/>
           <a:p>
             <a:pPr algn="ctr">
@@ -7832,7 +7832,7 @@
               </a:spcAft>
             </a:pPr>
             <a:r>
-              <a:rPr sz="1600" b="1">
+              <a:rPr sz="1200" b="1">
                 <a:solidFill>
                   <a:srgbClr val="1B8A5A"/>
                 </a:solidFill>
@@ -7842,19 +7842,19 @@
             </a:r>
           </a:p>
           <a:p>
-            <a:pPr algn="ctr">
+            <a:pPr>
               <a:lnSpc>
                 <a:spcPct val="95000"/>
               </a:lnSpc>
               <a:spcBef>
-                <a:spcPts val="800"/>
-              </a:spcBef>
-              <a:spcAft>
-                <a:spcPts val="0"/>
-              </a:spcAft>
-            </a:pPr>
-            <a:r>
-              <a:rPr sz="1200" b="1">
+                <a:spcPts val="500"/>
+              </a:spcBef>
+              <a:spcAft>
+                <a:spcPts val="0"/>
+              </a:spcAft>
+            </a:pPr>
+            <a:r>
+              <a:rPr sz="1050" b="0">
                 <a:solidFill>
                   <a:srgbClr val="262B33"/>
                 </a:solidFill>
@@ -7948,7 +7948,7 @@
           </a:fontRef>
         </p:style>
         <p:txBody>
-          <a:bodyPr rtlCol="0" anchor="t" wrap="square" lIns="109728" rIns="109728" tIns="128016" bIns="18288"/>
+          <a:bodyPr rtlCol="0" anchor="ctr" wrap="square" lIns="36576" rIns="36576" tIns="128016" bIns="18288"/>
           <a:lstStyle/>
           <a:p>
             <a:pPr algn="ctr">
@@ -7963,7 +7963,7 @@
               </a:spcAft>
             </a:pPr>
             <a:r>
-              <a:rPr sz="1600" b="1">
+              <a:rPr sz="1200" b="1">
                 <a:solidFill>
                   <a:srgbClr val="C77700"/>
                 </a:solidFill>
@@ -7973,19 +7973,19 @@
             </a:r>
           </a:p>
           <a:p>
-            <a:pPr algn="ctr">
+            <a:pPr>
               <a:lnSpc>
                 <a:spcPct val="95000"/>
               </a:lnSpc>
               <a:spcBef>
-                <a:spcPts val="800"/>
-              </a:spcBef>
-              <a:spcAft>
-                <a:spcPts val="0"/>
-              </a:spcAft>
-            </a:pPr>
-            <a:r>
-              <a:rPr sz="1200" b="1">
+                <a:spcPts val="500"/>
+              </a:spcBef>
+              <a:spcAft>
+                <a:spcPts val="0"/>
+              </a:spcAft>
+            </a:pPr>
+            <a:r>
+              <a:rPr sz="1050" b="0">
                 <a:solidFill>
                   <a:srgbClr val="262B33"/>
                 </a:solidFill>
@@ -8079,7 +8079,7 @@
           </a:fontRef>
         </p:style>
         <p:txBody>
-          <a:bodyPr rtlCol="0" anchor="t" wrap="square" lIns="109728" rIns="109728" tIns="128016" bIns="18288"/>
+          <a:bodyPr rtlCol="0" anchor="ctr" wrap="square" lIns="36576" rIns="36576" tIns="128016" bIns="18288"/>
           <a:lstStyle/>
           <a:p>
             <a:pPr algn="ctr">
@@ -8094,7 +8094,7 @@
               </a:spcAft>
             </a:pPr>
             <a:r>
-              <a:rPr sz="1600" b="1">
+              <a:rPr sz="1200" b="1">
                 <a:solidFill>
                   <a:srgbClr val="4B3F8C"/>
                 </a:solidFill>
@@ -8104,19 +8104,19 @@
             </a:r>
           </a:p>
           <a:p>
-            <a:pPr algn="ctr">
+            <a:pPr>
               <a:lnSpc>
                 <a:spcPct val="95000"/>
               </a:lnSpc>
               <a:spcBef>
-                <a:spcPts val="800"/>
-              </a:spcBef>
-              <a:spcAft>
-                <a:spcPts val="0"/>
-              </a:spcAft>
-            </a:pPr>
-            <a:r>
-              <a:rPr sz="1200" b="1">
+                <a:spcPts val="500"/>
+              </a:spcBef>
+              <a:spcAft>
+                <a:spcPts val="0"/>
+              </a:spcAft>
+            </a:pPr>
+            <a:r>
+              <a:rPr sz="1050" b="0">
                 <a:solidFill>
                   <a:srgbClr val="262B33"/>
                 </a:solidFill>
@@ -9882,7 +9882,7 @@
               </a:spcAft>
             </a:pPr>
             <a:r>
-              <a:rPr sz="1100" b="1">
+              <a:rPr sz="1000" b="1">
                 <a:solidFill>
                   <a:srgbClr val="FFFFFF"/>
                 </a:solidFill>
@@ -9927,7 +9927,7 @@
               </a:spcAft>
             </a:pPr>
             <a:r>
-              <a:rPr sz="1100" b="1">
+              <a:rPr sz="1000" b="1">
                 <a:solidFill>
                   <a:srgbClr val="FFFFFF"/>
                 </a:solidFill>
@@ -9972,7 +9972,7 @@
               </a:spcAft>
             </a:pPr>
             <a:r>
-              <a:rPr sz="1100" b="1">
+              <a:rPr sz="1000" b="1">
                 <a:solidFill>
                   <a:srgbClr val="FFFFFF"/>
                 </a:solidFill>
@@ -10036,7 +10036,7 @@
         <p:spPr>
           <a:xfrm>
             <a:off x="640080" y="3529584"/>
-            <a:ext cx="3520440" cy="310896"/>
+            <a:ext cx="3520440" cy="274320"/>
           </a:xfrm>
           <a:prstGeom prst="rect">
             <a:avLst/>
@@ -10044,7 +10044,7 @@
           <a:noFill/>
         </p:spPr>
         <p:txBody>
-          <a:bodyPr wrap="none" lIns="36576" rIns="36576" tIns="18288" bIns="18288">
+          <a:bodyPr wrap="square" lIns="36576" rIns="36576" tIns="18288" bIns="18288">
             <a:spAutoFit/>
           </a:bodyPr>
           <a:lstStyle/>
@@ -10061,7 +10061,7 @@
               </a:spcAft>
             </a:pPr>
             <a:r>
-              <a:rPr sz="1350" b="0">
+              <a:rPr sz="1150" b="0">
                 <a:solidFill>
                   <a:srgbClr val="262B33"/>
                 </a:solidFill>
@@ -10081,7 +10081,7 @@
         <p:spPr>
           <a:xfrm>
             <a:off x="4343400" y="3529584"/>
-            <a:ext cx="3703320" cy="310896"/>
+            <a:ext cx="3703320" cy="274320"/>
           </a:xfrm>
           <a:prstGeom prst="rect">
             <a:avLst/>
@@ -10089,7 +10089,7 @@
           <a:noFill/>
         </p:spPr>
         <p:txBody>
-          <a:bodyPr wrap="none" lIns="36576" rIns="36576" tIns="18288" bIns="18288">
+          <a:bodyPr wrap="square" lIns="36576" rIns="36576" tIns="18288" bIns="18288">
             <a:spAutoFit/>
           </a:bodyPr>
           <a:lstStyle/>
@@ -10106,7 +10106,7 @@
               </a:spcAft>
             </a:pPr>
             <a:r>
-              <a:rPr sz="1350" b="1">
+              <a:rPr sz="1150" b="1">
                 <a:solidFill>
                   <a:srgbClr val="262B33"/>
                 </a:solidFill>
@@ -10126,7 +10126,7 @@
         <p:spPr>
           <a:xfrm>
             <a:off x="8183879" y="3529584"/>
-            <a:ext cx="3383280" cy="310896"/>
+            <a:ext cx="3383280" cy="274320"/>
           </a:xfrm>
           <a:prstGeom prst="rect">
             <a:avLst/>
@@ -10134,7 +10134,7 @@
           <a:noFill/>
         </p:spPr>
         <p:txBody>
-          <a:bodyPr wrap="none" lIns="36576" rIns="36576" tIns="18288" bIns="18288">
+          <a:bodyPr wrap="square" lIns="36576" rIns="36576" tIns="18288" bIns="18288">
             <a:spAutoFit/>
           </a:bodyPr>
           <a:lstStyle/>
@@ -10151,7 +10151,7 @@
               </a:spcAft>
             </a:pPr>
             <a:r>
-              <a:rPr sz="1250" b="0">
+              <a:rPr sz="1100" b="0">
                 <a:solidFill>
                   <a:srgbClr val="5A626C"/>
                 </a:solidFill>
@@ -10171,7 +10171,7 @@
         <p:spPr>
           <a:xfrm>
             <a:off x="640080" y="3913632"/>
-            <a:ext cx="3520440" cy="310896"/>
+            <a:ext cx="3520440" cy="274320"/>
           </a:xfrm>
           <a:prstGeom prst="rect">
             <a:avLst/>
@@ -10179,7 +10179,7 @@
           <a:noFill/>
         </p:spPr>
         <p:txBody>
-          <a:bodyPr wrap="none" lIns="36576" rIns="36576" tIns="18288" bIns="18288">
+          <a:bodyPr wrap="square" lIns="36576" rIns="36576" tIns="18288" bIns="18288">
             <a:spAutoFit/>
           </a:bodyPr>
           <a:lstStyle/>
@@ -10196,7 +10196,7 @@
               </a:spcAft>
             </a:pPr>
             <a:r>
-              <a:rPr sz="1350" b="0">
+              <a:rPr sz="1150" b="0">
                 <a:solidFill>
                   <a:srgbClr val="262B33"/>
                 </a:solidFill>
@@ -10216,7 +10216,7 @@
         <p:spPr>
           <a:xfrm>
             <a:off x="4343400" y="3913632"/>
-            <a:ext cx="3703320" cy="310896"/>
+            <a:ext cx="3703320" cy="274320"/>
           </a:xfrm>
           <a:prstGeom prst="rect">
             <a:avLst/>
@@ -10224,7 +10224,7 @@
           <a:noFill/>
         </p:spPr>
         <p:txBody>
-          <a:bodyPr wrap="none" lIns="36576" rIns="36576" tIns="18288" bIns="18288">
+          <a:bodyPr wrap="square" lIns="36576" rIns="36576" tIns="18288" bIns="18288">
             <a:spAutoFit/>
           </a:bodyPr>
           <a:lstStyle/>
@@ -10241,7 +10241,7 @@
               </a:spcAft>
             </a:pPr>
             <a:r>
-              <a:rPr sz="1350" b="1">
+              <a:rPr sz="1150" b="1">
                 <a:solidFill>
                   <a:srgbClr val="1B8A5A"/>
                 </a:solidFill>
@@ -10261,7 +10261,7 @@
         <p:spPr>
           <a:xfrm>
             <a:off x="8183879" y="3913632"/>
-            <a:ext cx="3383280" cy="310896"/>
+            <a:ext cx="3383280" cy="274320"/>
           </a:xfrm>
           <a:prstGeom prst="rect">
             <a:avLst/>
@@ -10269,7 +10269,7 @@
           <a:noFill/>
         </p:spPr>
         <p:txBody>
-          <a:bodyPr wrap="none" lIns="36576" rIns="36576" tIns="18288" bIns="18288">
+          <a:bodyPr wrap="square" lIns="36576" rIns="36576" tIns="18288" bIns="18288">
             <a:spAutoFit/>
           </a:bodyPr>
           <a:lstStyle/>
@@ -10286,7 +10286,7 @@
               </a:spcAft>
             </a:pPr>
             <a:r>
-              <a:rPr sz="1250" b="0">
+              <a:rPr sz="1100" b="0">
                 <a:solidFill>
                   <a:srgbClr val="5A626C"/>
                 </a:solidFill>
@@ -10350,7 +10350,7 @@
         <p:spPr>
           <a:xfrm>
             <a:off x="640080" y="4297680"/>
-            <a:ext cx="3520440" cy="310896"/>
+            <a:ext cx="3520440" cy="274320"/>
           </a:xfrm>
           <a:prstGeom prst="rect">
             <a:avLst/>
@@ -10358,7 +10358,7 @@
           <a:noFill/>
         </p:spPr>
         <p:txBody>
-          <a:bodyPr wrap="none" lIns="36576" rIns="36576" tIns="18288" bIns="18288">
+          <a:bodyPr wrap="square" lIns="36576" rIns="36576" tIns="18288" bIns="18288">
             <a:spAutoFit/>
           </a:bodyPr>
           <a:lstStyle/>
@@ -10375,7 +10375,7 @@
               </a:spcAft>
             </a:pPr>
             <a:r>
-              <a:rPr sz="1350" b="0">
+              <a:rPr sz="1150" b="0">
                 <a:solidFill>
                   <a:srgbClr val="262B33"/>
                 </a:solidFill>
@@ -10395,7 +10395,7 @@
         <p:spPr>
           <a:xfrm>
             <a:off x="4343400" y="4297680"/>
-            <a:ext cx="3703320" cy="310896"/>
+            <a:ext cx="3703320" cy="274320"/>
           </a:xfrm>
           <a:prstGeom prst="rect">
             <a:avLst/>
@@ -10403,7 +10403,7 @@
           <a:noFill/>
         </p:spPr>
         <p:txBody>
-          <a:bodyPr wrap="none" lIns="36576" rIns="36576" tIns="18288" bIns="18288">
+          <a:bodyPr wrap="square" lIns="36576" rIns="36576" tIns="18288" bIns="18288">
             <a:spAutoFit/>
           </a:bodyPr>
           <a:lstStyle/>
@@ -10420,7 +10420,7 @@
               </a:spcAft>
             </a:pPr>
             <a:r>
-              <a:rPr sz="1350" b="1">
+              <a:rPr sz="1150" b="1">
                 <a:solidFill>
                   <a:srgbClr val="C0504D"/>
                 </a:solidFill>
@@ -10440,7 +10440,7 @@
         <p:spPr>
           <a:xfrm>
             <a:off x="8183879" y="4297680"/>
-            <a:ext cx="3383280" cy="310896"/>
+            <a:ext cx="3383280" cy="274320"/>
           </a:xfrm>
           <a:prstGeom prst="rect">
             <a:avLst/>
@@ -10448,7 +10448,7 @@
           <a:noFill/>
         </p:spPr>
         <p:txBody>
-          <a:bodyPr wrap="none" lIns="36576" rIns="36576" tIns="18288" bIns="18288">
+          <a:bodyPr wrap="square" lIns="36576" rIns="36576" tIns="18288" bIns="18288">
             <a:spAutoFit/>
           </a:bodyPr>
           <a:lstStyle/>
@@ -10465,7 +10465,7 @@
               </a:spcAft>
             </a:pPr>
             <a:r>
-              <a:rPr sz="1250" b="0">
+              <a:rPr sz="1100" b="0">
                 <a:solidFill>
                   <a:srgbClr val="5A626C"/>
                 </a:solidFill>
@@ -10485,7 +10485,7 @@
         <p:spPr>
           <a:xfrm>
             <a:off x="640080" y="4681728"/>
-            <a:ext cx="3520440" cy="310896"/>
+            <a:ext cx="3520440" cy="274320"/>
           </a:xfrm>
           <a:prstGeom prst="rect">
             <a:avLst/>
@@ -10493,7 +10493,7 @@
           <a:noFill/>
         </p:spPr>
         <p:txBody>
-          <a:bodyPr wrap="none" lIns="36576" rIns="36576" tIns="18288" bIns="18288">
+          <a:bodyPr wrap="square" lIns="36576" rIns="36576" tIns="18288" bIns="18288">
             <a:spAutoFit/>
           </a:bodyPr>
           <a:lstStyle/>
@@ -10510,7 +10510,7 @@
               </a:spcAft>
             </a:pPr>
             <a:r>
-              <a:rPr sz="1350" b="0">
+              <a:rPr sz="1150" b="0">
                 <a:solidFill>
                   <a:srgbClr val="262B33"/>
                 </a:solidFill>
@@ -10530,7 +10530,7 @@
         <p:spPr>
           <a:xfrm>
             <a:off x="4343400" y="4681728"/>
-            <a:ext cx="3703320" cy="310896"/>
+            <a:ext cx="3703320" cy="274320"/>
           </a:xfrm>
           <a:prstGeom prst="rect">
             <a:avLst/>
@@ -10538,7 +10538,7 @@
           <a:noFill/>
         </p:spPr>
         <p:txBody>
-          <a:bodyPr wrap="none" lIns="36576" rIns="36576" tIns="18288" bIns="18288">
+          <a:bodyPr wrap="square" lIns="36576" rIns="36576" tIns="18288" bIns="18288">
             <a:spAutoFit/>
           </a:bodyPr>
           <a:lstStyle/>
@@ -10555,7 +10555,7 @@
               </a:spcAft>
             </a:pPr>
             <a:r>
-              <a:rPr sz="1350" b="1">
+              <a:rPr sz="1150" b="1">
                 <a:solidFill>
                   <a:srgbClr val="C77700"/>
                 </a:solidFill>
@@ -10575,7 +10575,7 @@
         <p:spPr>
           <a:xfrm>
             <a:off x="8183879" y="4681728"/>
-            <a:ext cx="3383280" cy="310896"/>
+            <a:ext cx="3383280" cy="274320"/>
           </a:xfrm>
           <a:prstGeom prst="rect">
             <a:avLst/>
@@ -10583,7 +10583,7 @@
           <a:noFill/>
         </p:spPr>
         <p:txBody>
-          <a:bodyPr wrap="none" lIns="36576" rIns="36576" tIns="18288" bIns="18288">
+          <a:bodyPr wrap="square" lIns="36576" rIns="36576" tIns="18288" bIns="18288">
             <a:spAutoFit/>
           </a:bodyPr>
           <a:lstStyle/>
@@ -10600,7 +10600,7 @@
               </a:spcAft>
             </a:pPr>
             <a:r>
-              <a:rPr sz="1250" b="0">
+              <a:rPr sz="1100" b="0">
                 <a:solidFill>
                   <a:srgbClr val="5A626C"/>
                 </a:solidFill>
@@ -10664,7 +10664,7 @@
         <p:spPr>
           <a:xfrm>
             <a:off x="640080" y="5065776"/>
-            <a:ext cx="3520440" cy="310896"/>
+            <a:ext cx="3520440" cy="274320"/>
           </a:xfrm>
           <a:prstGeom prst="rect">
             <a:avLst/>
@@ -10672,7 +10672,7 @@
           <a:noFill/>
         </p:spPr>
         <p:txBody>
-          <a:bodyPr wrap="none" lIns="36576" rIns="36576" tIns="18288" bIns="18288">
+          <a:bodyPr wrap="square" lIns="36576" rIns="36576" tIns="18288" bIns="18288">
             <a:spAutoFit/>
           </a:bodyPr>
           <a:lstStyle/>
@@ -10689,7 +10689,7 @@
               </a:spcAft>
             </a:pPr>
             <a:r>
-              <a:rPr sz="1350" b="0">
+              <a:rPr sz="1150" b="0">
                 <a:solidFill>
                   <a:srgbClr val="262B33"/>
                 </a:solidFill>
@@ -10709,7 +10709,7 @@
         <p:spPr>
           <a:xfrm>
             <a:off x="4343400" y="5065776"/>
-            <a:ext cx="3703320" cy="310896"/>
+            <a:ext cx="3703320" cy="274320"/>
           </a:xfrm>
           <a:prstGeom prst="rect">
             <a:avLst/>
@@ -10717,7 +10717,7 @@
           <a:noFill/>
         </p:spPr>
         <p:txBody>
-          <a:bodyPr wrap="none" lIns="36576" rIns="36576" tIns="18288" bIns="18288">
+          <a:bodyPr wrap="square" lIns="36576" rIns="36576" tIns="18288" bIns="18288">
             <a:spAutoFit/>
           </a:bodyPr>
           <a:lstStyle/>
@@ -10734,7 +10734,7 @@
               </a:spcAft>
             </a:pPr>
             <a:r>
-              <a:rPr sz="1350" b="1">
+              <a:rPr sz="1150" b="1">
                 <a:solidFill>
                   <a:srgbClr val="4B3F8C"/>
                 </a:solidFill>
@@ -10754,7 +10754,7 @@
         <p:spPr>
           <a:xfrm>
             <a:off x="8183879" y="5065776"/>
-            <a:ext cx="3383280" cy="310896"/>
+            <a:ext cx="3383280" cy="274320"/>
           </a:xfrm>
           <a:prstGeom prst="rect">
             <a:avLst/>
@@ -10762,7 +10762,7 @@
           <a:noFill/>
         </p:spPr>
         <p:txBody>
-          <a:bodyPr wrap="none" lIns="36576" rIns="36576" tIns="18288" bIns="18288">
+          <a:bodyPr wrap="square" lIns="36576" rIns="36576" tIns="18288" bIns="18288">
             <a:spAutoFit/>
           </a:bodyPr>
           <a:lstStyle/>
@@ -10779,7 +10779,7 @@
               </a:spcAft>
             </a:pPr>
             <a:r>
-              <a:rPr sz="1250" b="0">
+              <a:rPr sz="1100" b="0">
                 <a:solidFill>
                   <a:srgbClr val="5A626C"/>
                 </a:solidFill>
@@ -10850,7 +10850,7 @@
                 </a:solidFill>
                 <a:latin typeface="Arial"/>
               </a:rPr>
-              <a:t>STACK   Python · Playwright · LLM extraction with failover · Pydantic v2 · Supabase PostgreSQL · FastAPI · Cloudflare · cron</a:t>
+              <a:t>STACK   Python · Playwright · LLM extraction with failover · Pydantic v2 · Supabase · FastAPI · Cloudflare · cron · source monitor · licensed feed</a:t>
             </a:r>
           </a:p>
         </p:txBody>
@@ -11321,7 +11321,7 @@
         <p:spPr>
           <a:xfrm>
             <a:off x="640080" y="1225296"/>
-            <a:ext cx="3749039" cy="987552"/>
+            <a:ext cx="3840480" cy="987552"/>
           </a:xfrm>
           <a:prstGeom prst="rect">
             <a:avLst/>
@@ -11346,7 +11346,7 @@
               </a:spcAft>
             </a:pPr>
             <a:r>
-              <a:rPr sz="1600" b="1">
+              <a:rPr sz="1400" b="1">
                 <a:solidFill>
                   <a:srgbClr val="4F81BD"/>
                 </a:solidFill>
@@ -11387,8 +11387,8 @@
         </p:nvSpPr>
         <p:spPr>
           <a:xfrm>
-            <a:off x="4434840" y="1444752"/>
-            <a:ext cx="1691640" cy="640080"/>
+            <a:off x="4572000" y="1444752"/>
+            <a:ext cx="1481328" cy="566928"/>
           </a:xfrm>
           <a:prstGeom prst="rect">
             <a:avLst/>
@@ -11413,7 +11413,7 @@
               </a:spcAft>
             </a:pPr>
             <a:r>
-              <a:rPr sz="1800" b="1">
+              <a:rPr sz="1350" b="1">
                 <a:solidFill>
                   <a:srgbClr val="4F81BD"/>
                 </a:solidFill>
@@ -11435,7 +11435,7 @@
               </a:spcAft>
             </a:pPr>
             <a:r>
-              <a:rPr sz="1000" b="1">
+              <a:rPr sz="900" b="0">
                 <a:solidFill>
                   <a:srgbClr val="5A626C"/>
                 </a:solidFill>
@@ -11545,7 +11545,7 @@
         <p:spPr>
           <a:xfrm>
             <a:off x="640080" y="2468880"/>
-            <a:ext cx="3749039" cy="987552"/>
+            <a:ext cx="3840480" cy="987552"/>
           </a:xfrm>
           <a:prstGeom prst="rect">
             <a:avLst/>
@@ -11570,7 +11570,7 @@
               </a:spcAft>
             </a:pPr>
             <a:r>
-              <a:rPr sz="1600" b="1">
+              <a:rPr sz="1400" b="1">
                 <a:solidFill>
                   <a:srgbClr val="1B8A5A"/>
                 </a:solidFill>
@@ -11611,8 +11611,8 @@
         </p:nvSpPr>
         <p:spPr>
           <a:xfrm>
-            <a:off x="4434840" y="2688336"/>
-            <a:ext cx="1691640" cy="640080"/>
+            <a:off x="4572000" y="2688336"/>
+            <a:ext cx="1481328" cy="566928"/>
           </a:xfrm>
           <a:prstGeom prst="rect">
             <a:avLst/>
@@ -11637,7 +11637,7 @@
               </a:spcAft>
             </a:pPr>
             <a:r>
-              <a:rPr sz="1800" b="1">
+              <a:rPr sz="1350" b="1">
                 <a:solidFill>
                   <a:srgbClr val="1B8A5A"/>
                 </a:solidFill>
@@ -11659,7 +11659,7 @@
               </a:spcAft>
             </a:pPr>
             <a:r>
-              <a:rPr sz="1000" b="1">
+              <a:rPr sz="900" b="0">
                 <a:solidFill>
                   <a:srgbClr val="5A626C"/>
                 </a:solidFill>
@@ -11769,7 +11769,7 @@
         <p:spPr>
           <a:xfrm>
             <a:off x="640080" y="3712463"/>
-            <a:ext cx="3749039" cy="987552"/>
+            <a:ext cx="3840480" cy="987552"/>
           </a:xfrm>
           <a:prstGeom prst="rect">
             <a:avLst/>
@@ -11794,7 +11794,7 @@
               </a:spcAft>
             </a:pPr>
             <a:r>
-              <a:rPr sz="1600" b="1">
+              <a:rPr sz="1400" b="1">
                 <a:solidFill>
                   <a:srgbClr val="C77700"/>
                 </a:solidFill>
@@ -11835,8 +11835,8 @@
         </p:nvSpPr>
         <p:spPr>
           <a:xfrm>
-            <a:off x="4434840" y="3931920"/>
-            <a:ext cx="1691640" cy="640080"/>
+            <a:off x="4572000" y="3931920"/>
+            <a:ext cx="1481328" cy="566928"/>
           </a:xfrm>
           <a:prstGeom prst="rect">
             <a:avLst/>
@@ -11861,7 +11861,7 @@
               </a:spcAft>
             </a:pPr>
             <a:r>
-              <a:rPr sz="1800" b="1">
+              <a:rPr sz="1350" b="1">
                 <a:solidFill>
                   <a:srgbClr val="C77700"/>
                 </a:solidFill>
@@ -11883,7 +11883,7 @@
               </a:spcAft>
             </a:pPr>
             <a:r>
-              <a:rPr sz="1000" b="1">
+              <a:rPr sz="900" b="0">
                 <a:solidFill>
                   <a:srgbClr val="5A626C"/>
                 </a:solidFill>
@@ -11993,7 +11993,7 @@
         <p:spPr>
           <a:xfrm>
             <a:off x="640080" y="4956048"/>
-            <a:ext cx="3749039" cy="987552"/>
+            <a:ext cx="3840480" cy="987552"/>
           </a:xfrm>
           <a:prstGeom prst="rect">
             <a:avLst/>
@@ -12018,7 +12018,7 @@
               </a:spcAft>
             </a:pPr>
             <a:r>
-              <a:rPr sz="1600" b="1">
+              <a:rPr sz="1400" b="1">
                 <a:solidFill>
                   <a:srgbClr val="4B3F8C"/>
                 </a:solidFill>
@@ -12059,8 +12059,8 @@
         </p:nvSpPr>
         <p:spPr>
           <a:xfrm>
-            <a:off x="4434840" y="5175504"/>
-            <a:ext cx="1691640" cy="640080"/>
+            <a:off x="4572000" y="5175504"/>
+            <a:ext cx="1481328" cy="566928"/>
           </a:xfrm>
           <a:prstGeom prst="rect">
             <a:avLst/>
@@ -12085,7 +12085,7 @@
               </a:spcAft>
             </a:pPr>
             <a:r>
-              <a:rPr sz="1800" b="1">
+              <a:rPr sz="1350" b="1">
                 <a:solidFill>
                   <a:srgbClr val="4B3F8C"/>
                 </a:solidFill>
@@ -12107,7 +12107,7 @@
               </a:spcAft>
             </a:pPr>
             <a:r>
-              <a:rPr sz="1000" b="1">
+              <a:rPr sz="900" b="0">
                 <a:solidFill>
                   <a:srgbClr val="5A626C"/>
                 </a:solidFill>
@@ -12337,7 +12337,7 @@
                 </a:solidFill>
                 <a:latin typeface="Arial"/>
               </a:rPr>
-              <a:t>16 portals surveyed, one is usable</a:t>
+              <a:t>One portal was usable — then it closed</a:t>
             </a:r>
           </a:p>
           <a:p>
@@ -12359,7 +12359,7 @@
                 </a:solidFill>
                 <a:latin typeface="Arial"/>
               </a:rPr>
-              <a:t>Ten disallow us, four block us, airlines refuse automation entirely.</a:t>
+              <a:t>Cleartrip put its search API behind Akamai on 15 Sep. We did not evade it.</a:t>
             </a:r>
           </a:p>
         </p:txBody>
@@ -12494,7 +12494,7 @@
                 </a:solidFill>
                 <a:latin typeface="Arial"/>
               </a:rPr>
-              <a:t>Cloud IPs are blocked too</a:t>
+              <a:t>A source can vanish overnight</a:t>
             </a:r>
           </a:p>
           <a:p>
@@ -12516,7 +12516,7 @@
                 </a:solidFill>
                 <a:latin typeface="Arial"/>
               </a:rPr>
-              <a:t>Verified in CI — so collection runs from a residential host.</a:t>
+              <a:t>A monitor scores every run and names the failure: a layout change is repaired, a block is never evaded.</a:t>
             </a:r>
           </a:p>
         </p:txBody>
@@ -12651,7 +12651,7 @@
                 </a:solidFill>
                 <a:latin typeface="Arial"/>
               </a:rPr>
-              <a:t>Models get retired without notice</a:t>
+              <a:t>So the data now comes from a licensed feed</a:t>
             </a:r>
           </a:p>
           <a:p>
@@ -12673,7 +12673,7 @@
                 </a:solidFill>
                 <a:latin typeface="Arial"/>
               </a:rPr>
-              <a:t>Three died during this build. Extraction now fails over automatically.</a:t>
+              <a:t>Aviasales Data API, one-way fares, every 10 minutes — its own segment, not spliced onto the old series.</a:t>
             </a:r>
           </a:p>
         </p:txBody>
@@ -12808,7 +12808,7 @@
                 </a:solidFill>
                 <a:latin typeface="Arial"/>
               </a:rPr>
-              <a:t>Thin coverage would mislead</a:t>
+              <a:t>Models get retired without notice</a:t>
             </a:r>
           </a:p>
           <a:p>
@@ -12830,7 +12830,7 @@
                 </a:solidFill>
                 <a:latin typeface="Arial"/>
               </a:rPr>
-              <a:t>Days below 60% basket weight publish as provisional, with the reason.</a:t>
+              <a:t>Three died during this build. Extraction now fails over automatically.</a:t>
             </a:r>
           </a:p>
         </p:txBody>
@@ -12978,8 +12978,8 @@
         </p:nvSpPr>
         <p:spPr>
           <a:xfrm>
-            <a:off x="6547104" y="5486400"/>
-            <a:ext cx="3291840" cy="182880"/>
+            <a:off x="6547104" y="5504688"/>
+            <a:ext cx="3291840" cy="155448"/>
           </a:xfrm>
           <a:prstGeom prst="rect">
             <a:avLst/>
@@ -12987,7 +12987,7 @@
           <a:noFill/>
         </p:spPr>
         <p:txBody>
-          <a:bodyPr wrap="none" lIns="36576" rIns="36576" tIns="0" bIns="0">
+          <a:bodyPr wrap="square" lIns="36576" rIns="36576" tIns="18288" bIns="18288">
             <a:spAutoFit/>
           </a:bodyPr>
           <a:lstStyle/>
@@ -13004,7 +13004,7 @@
               </a:spcAft>
             </a:pPr>
             <a:r>
-              <a:rPr sz="1200" b="1">
+              <a:rPr sz="1000" b="0">
                 <a:solidFill>
                   <a:srgbClr val="262B33"/>
                 </a:solidFill>
@@ -13023,8 +13023,8 @@
         </p:nvSpPr>
         <p:spPr>
           <a:xfrm>
-            <a:off x="9921240" y="5486400"/>
-            <a:ext cx="1737360" cy="182880"/>
+            <a:off x="9921240" y="5504688"/>
+            <a:ext cx="1737360" cy="155448"/>
           </a:xfrm>
           <a:prstGeom prst="rect">
             <a:avLst/>
@@ -13032,7 +13032,7 @@
           <a:noFill/>
         </p:spPr>
         <p:txBody>
-          <a:bodyPr wrap="none" lIns="36576" rIns="36576" tIns="0" bIns="0">
+          <a:bodyPr wrap="square" lIns="36576" rIns="36576" tIns="18288" bIns="18288">
             <a:spAutoFit/>
           </a:bodyPr>
           <a:lstStyle/>
@@ -13049,7 +13049,7 @@
               </a:spcAft>
             </a:pPr>
             <a:r>
-              <a:rPr sz="1200" b="1">
+              <a:rPr sz="1000" b="0">
                 <a:solidFill>
                   <a:srgbClr val="5A626C"/>
                 </a:solidFill>
@@ -13068,8 +13068,8 @@
         </p:nvSpPr>
         <p:spPr>
           <a:xfrm>
-            <a:off x="6547104" y="5647334"/>
-            <a:ext cx="3291840" cy="182880"/>
+            <a:off x="6547104" y="5660136"/>
+            <a:ext cx="3291840" cy="155448"/>
           </a:xfrm>
           <a:prstGeom prst="rect">
             <a:avLst/>
@@ -13077,7 +13077,7 @@
           <a:noFill/>
         </p:spPr>
         <p:txBody>
-          <a:bodyPr wrap="none" lIns="36576" rIns="36576" tIns="0" bIns="0">
+          <a:bodyPr wrap="square" lIns="36576" rIns="36576" tIns="18288" bIns="18288">
             <a:spAutoFit/>
           </a:bodyPr>
           <a:lstStyle/>
@@ -13094,7 +13094,7 @@
               </a:spcAft>
             </a:pPr>
             <a:r>
-              <a:rPr sz="1200" b="1">
+              <a:rPr sz="1000" b="0">
                 <a:solidFill>
                   <a:srgbClr val="262B33"/>
                 </a:solidFill>
@@ -13113,8 +13113,8 @@
         </p:nvSpPr>
         <p:spPr>
           <a:xfrm>
-            <a:off x="9921240" y="5647334"/>
-            <a:ext cx="1737360" cy="182880"/>
+            <a:off x="9921240" y="5660136"/>
+            <a:ext cx="1737360" cy="155448"/>
           </a:xfrm>
           <a:prstGeom prst="rect">
             <a:avLst/>
@@ -13122,7 +13122,7 @@
           <a:noFill/>
         </p:spPr>
         <p:txBody>
-          <a:bodyPr wrap="none" lIns="36576" rIns="36576" tIns="0" bIns="0">
+          <a:bodyPr wrap="square" lIns="36576" rIns="36576" tIns="18288" bIns="18288">
             <a:spAutoFit/>
           </a:bodyPr>
           <a:lstStyle/>
@@ -13139,7 +13139,7 @@
               </a:spcAft>
             </a:pPr>
             <a:r>
-              <a:rPr sz="1200" b="1">
+              <a:rPr sz="1000" b="0">
                 <a:solidFill>
                   <a:srgbClr val="5A626C"/>
                 </a:solidFill>
@@ -13158,8 +13158,8 @@
         </p:nvSpPr>
         <p:spPr>
           <a:xfrm>
-            <a:off x="6547104" y="5808268"/>
-            <a:ext cx="3291840" cy="182880"/>
+            <a:off x="6547104" y="5815583"/>
+            <a:ext cx="3291840" cy="155448"/>
           </a:xfrm>
           <a:prstGeom prst="rect">
             <a:avLst/>
@@ -13167,7 +13167,7 @@
           <a:noFill/>
         </p:spPr>
         <p:txBody>
-          <a:bodyPr wrap="none" lIns="36576" rIns="36576" tIns="0" bIns="0">
+          <a:bodyPr wrap="square" lIns="36576" rIns="36576" tIns="18288" bIns="18288">
             <a:spAutoFit/>
           </a:bodyPr>
           <a:lstStyle/>
@@ -13184,7 +13184,7 @@
               </a:spcAft>
             </a:pPr>
             <a:r>
-              <a:rPr sz="1200" b="1">
+              <a:rPr sz="1000" b="0">
                 <a:solidFill>
                   <a:srgbClr val="262B33"/>
                 </a:solidFill>
@@ -13203,8 +13203,8 @@
         </p:nvSpPr>
         <p:spPr>
           <a:xfrm>
-            <a:off x="9921240" y="5808268"/>
-            <a:ext cx="1737360" cy="182880"/>
+            <a:off x="9921240" y="5815583"/>
+            <a:ext cx="1737360" cy="155448"/>
           </a:xfrm>
           <a:prstGeom prst="rect">
             <a:avLst/>
@@ -13212,7 +13212,7 @@
           <a:noFill/>
         </p:spPr>
         <p:txBody>
-          <a:bodyPr wrap="none" lIns="36576" rIns="36576" tIns="0" bIns="0">
+          <a:bodyPr wrap="square" lIns="36576" rIns="36576" tIns="18288" bIns="18288">
             <a:spAutoFit/>
           </a:bodyPr>
           <a:lstStyle/>
@@ -13229,7 +13229,7 @@
               </a:spcAft>
             </a:pPr>
             <a:r>
-              <a:rPr sz="1200" b="1">
+              <a:rPr sz="1000" b="0">
                 <a:solidFill>
                   <a:srgbClr val="5A626C"/>
                 </a:solidFill>
@@ -13248,8 +13248,8 @@
         </p:nvSpPr>
         <p:spPr>
           <a:xfrm>
-            <a:off x="6547104" y="5969203"/>
-            <a:ext cx="3291840" cy="182880"/>
+            <a:off x="6547104" y="5971031"/>
+            <a:ext cx="3291840" cy="155448"/>
           </a:xfrm>
           <a:prstGeom prst="rect">
             <a:avLst/>
@@ -13257,7 +13257,7 @@
           <a:noFill/>
         </p:spPr>
         <p:txBody>
-          <a:bodyPr wrap="none" lIns="36576" rIns="36576" tIns="0" bIns="0">
+          <a:bodyPr wrap="square" lIns="36576" rIns="36576" tIns="18288" bIns="18288">
             <a:spAutoFit/>
           </a:bodyPr>
           <a:lstStyle/>
@@ -13274,7 +13274,7 @@
               </a:spcAft>
             </a:pPr>
             <a:r>
-              <a:rPr sz="1200" b="1">
+              <a:rPr sz="1000" b="0">
                 <a:solidFill>
                   <a:srgbClr val="262B33"/>
                 </a:solidFill>
@@ -13293,8 +13293,8 @@
         </p:nvSpPr>
         <p:spPr>
           <a:xfrm>
-            <a:off x="9921240" y="5969203"/>
-            <a:ext cx="1737360" cy="182880"/>
+            <a:off x="9921240" y="5971031"/>
+            <a:ext cx="1737360" cy="155448"/>
           </a:xfrm>
           <a:prstGeom prst="rect">
             <a:avLst/>
@@ -13302,7 +13302,7 @@
           <a:noFill/>
         </p:spPr>
         <p:txBody>
-          <a:bodyPr wrap="none" lIns="36576" rIns="36576" tIns="0" bIns="0">
+          <a:bodyPr wrap="square" lIns="36576" rIns="36576" tIns="18288" bIns="18288">
             <a:spAutoFit/>
           </a:bodyPr>
           <a:lstStyle/>
@@ -13319,7 +13319,7 @@
               </a:spcAft>
             </a:pPr>
             <a:r>
-              <a:rPr sz="1200" b="1">
+              <a:rPr sz="1000" b="0">
                 <a:solidFill>
                   <a:srgbClr val="5A626C"/>
                 </a:solidFill>
@@ -13338,8 +13338,8 @@
         </p:nvSpPr>
         <p:spPr>
           <a:xfrm>
-            <a:off x="6547104" y="6130137"/>
-            <a:ext cx="3291840" cy="182880"/>
+            <a:off x="6547104" y="6126479"/>
+            <a:ext cx="3291840" cy="155448"/>
           </a:xfrm>
           <a:prstGeom prst="rect">
             <a:avLst/>
@@ -13347,7 +13347,7 @@
           <a:noFill/>
         </p:spPr>
         <p:txBody>
-          <a:bodyPr wrap="none" lIns="36576" rIns="36576" tIns="0" bIns="0">
+          <a:bodyPr wrap="square" lIns="36576" rIns="36576" tIns="18288" bIns="18288">
             <a:spAutoFit/>
           </a:bodyPr>
           <a:lstStyle/>
@@ -13364,7 +13364,7 @@
               </a:spcAft>
             </a:pPr>
             <a:r>
-              <a:rPr sz="1200" b="1">
+              <a:rPr sz="1000" b="1">
                 <a:solidFill>
                   <a:srgbClr val="1B8A5A"/>
                 </a:solidFill>
@@ -13383,8 +13383,8 @@
         </p:nvSpPr>
         <p:spPr>
           <a:xfrm>
-            <a:off x="9921240" y="6130137"/>
-            <a:ext cx="1737360" cy="182880"/>
+            <a:off x="9921240" y="6126479"/>
+            <a:ext cx="1737360" cy="155448"/>
           </a:xfrm>
           <a:prstGeom prst="rect">
             <a:avLst/>
@@ -13392,7 +13392,7 @@
           <a:noFill/>
         </p:spPr>
         <p:txBody>
-          <a:bodyPr wrap="none" lIns="36576" rIns="36576" tIns="0" bIns="0">
+          <a:bodyPr wrap="square" lIns="36576" rIns="36576" tIns="18288" bIns="18288">
             <a:spAutoFit/>
           </a:bodyPr>
           <a:lstStyle/>
@@ -13409,7 +13409,7 @@
               </a:spcAft>
             </a:pPr>
             <a:r>
-              <a:rPr sz="1200" b="1">
+              <a:rPr sz="1000" b="1">
                 <a:solidFill>
                   <a:srgbClr val="1B8A5A"/>
                 </a:solidFill>
@@ -13935,7 +13935,7 @@
               </a:spcAft>
             </a:pPr>
             <a:r>
-              <a:rPr sz="1400" b="1">
+              <a:rPr sz="1200" b="1">
                 <a:solidFill>
                   <a:srgbClr val="4F81BD"/>
                 </a:solidFill>
@@ -13945,7 +13945,7 @@
             </a:r>
           </a:p>
           <a:p>
-            <a:pPr algn="ctr">
+            <a:pPr>
               <a:lnSpc>
                 <a:spcPct val="95000"/>
               </a:lnSpc>
@@ -13957,7 +13957,7 @@
               </a:spcAft>
             </a:pPr>
             <a:r>
-              <a:rPr sz="1400" b="1">
+              <a:rPr sz="1300" b="1">
                 <a:solidFill>
                   <a:srgbClr val="1F497D"/>
                 </a:solidFill>
@@ -13967,7 +13967,7 @@
             </a:r>
           </a:p>
           <a:p>
-            <a:pPr algn="ctr">
+            <a:pPr>
               <a:lnSpc>
                 <a:spcPct val="95000"/>
               </a:lnSpc>
@@ -13979,7 +13979,7 @@
               </a:spcAft>
             </a:pPr>
             <a:r>
-              <a:rPr sz="1100" b="0">
+              <a:rPr sz="1050" b="0">
                 <a:solidFill>
                   <a:srgbClr val="5A626C"/>
                 </a:solidFill>
@@ -14088,7 +14088,7 @@
               </a:spcAft>
             </a:pPr>
             <a:r>
-              <a:rPr sz="1400" b="1">
+              <a:rPr sz="1200" b="1">
                 <a:solidFill>
                   <a:srgbClr val="1B8A5A"/>
                 </a:solidFill>
@@ -14098,7 +14098,7 @@
             </a:r>
           </a:p>
           <a:p>
-            <a:pPr algn="ctr">
+            <a:pPr>
               <a:lnSpc>
                 <a:spcPct val="95000"/>
               </a:lnSpc>
@@ -14110,7 +14110,7 @@
               </a:spcAft>
             </a:pPr>
             <a:r>
-              <a:rPr sz="1400" b="1">
+              <a:rPr sz="1300" b="1">
                 <a:solidFill>
                   <a:srgbClr val="1F497D"/>
                 </a:solidFill>
@@ -14120,7 +14120,7 @@
             </a:r>
           </a:p>
           <a:p>
-            <a:pPr algn="ctr">
+            <a:pPr>
               <a:lnSpc>
                 <a:spcPct val="95000"/>
               </a:lnSpc>
@@ -14132,7 +14132,7 @@
               </a:spcAft>
             </a:pPr>
             <a:r>
-              <a:rPr sz="1100" b="0">
+              <a:rPr sz="1050" b="0">
                 <a:solidFill>
                   <a:srgbClr val="5A626C"/>
                 </a:solidFill>
@@ -14241,7 +14241,7 @@
               </a:spcAft>
             </a:pPr>
             <a:r>
-              <a:rPr sz="1400" b="1">
+              <a:rPr sz="1200" b="1">
                 <a:solidFill>
                   <a:srgbClr val="C77700"/>
                 </a:solidFill>
@@ -14251,7 +14251,7 @@
             </a:r>
           </a:p>
           <a:p>
-            <a:pPr algn="ctr">
+            <a:pPr>
               <a:lnSpc>
                 <a:spcPct val="95000"/>
               </a:lnSpc>
@@ -14263,7 +14263,7 @@
               </a:spcAft>
             </a:pPr>
             <a:r>
-              <a:rPr sz="1400" b="1">
+              <a:rPr sz="1300" b="1">
                 <a:solidFill>
                   <a:srgbClr val="1F497D"/>
                 </a:solidFill>
@@ -14273,7 +14273,7 @@
             </a:r>
           </a:p>
           <a:p>
-            <a:pPr algn="ctr">
+            <a:pPr>
               <a:lnSpc>
                 <a:spcPct val="95000"/>
               </a:lnSpc>
@@ -14285,7 +14285,7 @@
               </a:spcAft>
             </a:pPr>
             <a:r>
-              <a:rPr sz="1100" b="0">
+              <a:rPr sz="1050" b="0">
                 <a:solidFill>
                   <a:srgbClr val="5A626C"/>
                 </a:solidFill>
@@ -14394,7 +14394,7 @@
               </a:spcAft>
             </a:pPr>
             <a:r>
-              <a:rPr sz="1400" b="1">
+              <a:rPr sz="1200" b="1">
                 <a:solidFill>
                   <a:srgbClr val="4B3F8C"/>
                 </a:solidFill>
@@ -14404,7 +14404,7 @@
             </a:r>
           </a:p>
           <a:p>
-            <a:pPr algn="ctr">
+            <a:pPr>
               <a:lnSpc>
                 <a:spcPct val="95000"/>
               </a:lnSpc>
@@ -14416,7 +14416,7 @@
               </a:spcAft>
             </a:pPr>
             <a:r>
-              <a:rPr sz="1400" b="1">
+              <a:rPr sz="1300" b="1">
                 <a:solidFill>
                   <a:srgbClr val="1F497D"/>
                 </a:solidFill>
@@ -14426,7 +14426,7 @@
             </a:r>
           </a:p>
           <a:p>
-            <a:pPr algn="ctr">
+            <a:pPr>
               <a:lnSpc>
                 <a:spcPct val="95000"/>
               </a:lnSpc>
@@ -14438,7 +14438,7 @@
               </a:spcAft>
             </a:pPr>
             <a:r>
-              <a:rPr sz="1100" b="0">
+              <a:rPr sz="1050" b="0">
                 <a:solidFill>
                   <a:srgbClr val="5A626C"/>
                 </a:solidFill>
@@ -14547,7 +14547,7 @@
               </a:spcAft>
             </a:pPr>
             <a:r>
-              <a:rPr sz="1400" b="1">
+              <a:rPr sz="1200" b="1">
                 <a:solidFill>
                   <a:srgbClr val="0E7C86"/>
                 </a:solidFill>
@@ -14557,7 +14557,7 @@
             </a:r>
           </a:p>
           <a:p>
-            <a:pPr algn="ctr">
+            <a:pPr>
               <a:lnSpc>
                 <a:spcPct val="95000"/>
               </a:lnSpc>
@@ -14569,7 +14569,7 @@
               </a:spcAft>
             </a:pPr>
             <a:r>
-              <a:rPr sz="1400" b="1">
+              <a:rPr sz="1300" b="1">
                 <a:solidFill>
                   <a:srgbClr val="1F497D"/>
                 </a:solidFill>
@@ -14579,7 +14579,7 @@
             </a:r>
           </a:p>
           <a:p>
-            <a:pPr algn="ctr">
+            <a:pPr>
               <a:lnSpc>
                 <a:spcPct val="95000"/>
               </a:lnSpc>
@@ -14591,7 +14591,7 @@
               </a:spcAft>
             </a:pPr>
             <a:r>
-              <a:rPr sz="1100" b="0">
+              <a:rPr sz="1050" b="0">
                 <a:solidFill>
                   <a:srgbClr val="5A626C"/>
                 </a:solidFill>
@@ -14700,7 +14700,7 @@
               </a:spcAft>
             </a:pPr>
             <a:r>
-              <a:rPr sz="1400" b="1">
+              <a:rPr sz="1200" b="1">
                 <a:solidFill>
                   <a:srgbClr val="7A3E6B"/>
                 </a:solidFill>
@@ -14710,7 +14710,7 @@
             </a:r>
           </a:p>
           <a:p>
-            <a:pPr algn="ctr">
+            <a:pPr>
               <a:lnSpc>
                 <a:spcPct val="95000"/>
               </a:lnSpc>
@@ -14722,7 +14722,7 @@
               </a:spcAft>
             </a:pPr>
             <a:r>
-              <a:rPr sz="1400" b="1">
+              <a:rPr sz="1300" b="1">
                 <a:solidFill>
                   <a:srgbClr val="1F497D"/>
                 </a:solidFill>
@@ -14732,7 +14732,7 @@
             </a:r>
           </a:p>
           <a:p>
-            <a:pPr algn="ctr">
+            <a:pPr>
               <a:lnSpc>
                 <a:spcPct val="95000"/>
               </a:lnSpc>
@@ -14744,7 +14744,7 @@
               </a:spcAft>
             </a:pPr>
             <a:r>
-              <a:rPr sz="1100" b="0">
+              <a:rPr sz="1050" b="0">
                 <a:solidFill>
                   <a:srgbClr val="5A626C"/>
                 </a:solidFill>
@@ -14813,7 +14813,7 @@
               </a:spcAft>
             </a:pPr>
             <a:r>
-              <a:rPr sz="1300" b="1">
+              <a:rPr sz="1200" b="1">
                 <a:solidFill>
                   <a:srgbClr val="4F81BD"/>
                 </a:solidFill>
@@ -14980,7 +14980,7 @@
           <a:p>
             <a:pPr algn="ctr"/>
             <a:r>
-              <a:rPr sz="1400" b="1">
+              <a:rPr sz="1100" b="1">
                 <a:solidFill>
                   <a:srgbClr val="FFFFFF"/>
                 </a:solidFill>
@@ -15025,7 +15025,7 @@
               </a:spcAft>
             </a:pPr>
             <a:r>
-              <a:rPr sz="1200" b="1">
+              <a:rPr sz="1150" b="0">
                 <a:solidFill>
                   <a:srgbClr val="262B33"/>
                 </a:solidFill>
@@ -15080,7 +15080,7 @@
           <a:p>
             <a:pPr algn="ctr"/>
             <a:r>
-              <a:rPr sz="1400" b="1">
+              <a:rPr sz="1100" b="1">
                 <a:solidFill>
                   <a:srgbClr val="FFFFFF"/>
                 </a:solidFill>
@@ -15125,7 +15125,7 @@
               </a:spcAft>
             </a:pPr>
             <a:r>
-              <a:rPr sz="1200" b="1">
+              <a:rPr sz="1150" b="0">
                 <a:solidFill>
                   <a:srgbClr val="262B33"/>
                 </a:solidFill>
@@ -15180,7 +15180,7 @@
           <a:p>
             <a:pPr algn="ctr"/>
             <a:r>
-              <a:rPr sz="1400" b="1">
+              <a:rPr sz="1100" b="1">
                 <a:solidFill>
                   <a:srgbClr val="FFFFFF"/>
                 </a:solidFill>
@@ -15225,7 +15225,7 @@
               </a:spcAft>
             </a:pPr>
             <a:r>
-              <a:rPr sz="1200" b="1">
+              <a:rPr sz="1150" b="0">
                 <a:solidFill>
                   <a:srgbClr val="262B33"/>
                 </a:solidFill>
@@ -15280,7 +15280,7 @@
           <a:p>
             <a:pPr algn="ctr"/>
             <a:r>
-              <a:rPr sz="1400" b="1">
+              <a:rPr sz="1100" b="1">
                 <a:solidFill>
                   <a:srgbClr val="FFFFFF"/>
                 </a:solidFill>
@@ -15325,7 +15325,7 @@
               </a:spcAft>
             </a:pPr>
             <a:r>
-              <a:rPr sz="1200" b="1">
+              <a:rPr sz="1150" b="0">
                 <a:solidFill>
                   <a:srgbClr val="262B33"/>
                 </a:solidFill>
@@ -15729,7 +15729,7 @@
               </a:spcAft>
             </a:pPr>
             <a:r>
-              <a:rPr sz="1100" b="1">
+              <a:rPr sz="1100" b="0">
                 <a:solidFill>
                   <a:srgbClr val="262B33"/>
                 </a:solidFill>
@@ -16283,7 +16283,7 @@
               </a:spcAft>
             </a:pPr>
             <a:r>
-              <a:rPr sz="1600" b="1">
+              <a:rPr sz="1350" b="1">
                 <a:solidFill>
                   <a:srgbClr val="4F81BD"/>
                 </a:solidFill>
@@ -16298,14 +16298,14 @@
                 <a:spcPct val="95000"/>
               </a:lnSpc>
               <a:spcBef>
-                <a:spcPts val="500"/>
-              </a:spcBef>
-              <a:spcAft>
-                <a:spcPts val="0"/>
-              </a:spcAft>
-            </a:pPr>
-            <a:r>
-              <a:rPr sz="1400" b="0">
+                <a:spcPts val="400"/>
+              </a:spcBef>
+              <a:spcAft>
+                <a:spcPts val="0"/>
+              </a:spcAft>
+            </a:pPr>
+            <a:r>
+              <a:rPr sz="1150" b="0">
                 <a:solidFill>
                   <a:srgbClr val="262B33"/>
                 </a:solidFill>
@@ -16340,7 +16340,7 @@
           <a:p>
             <a:pPr algn="r"/>
             <a:r>
-              <a:rPr sz="1200" b="1" u="sng">
+              <a:rPr sz="1050" b="1" u="sng">
                 <a:solidFill>
                   <a:srgbClr val="4F81BD"/>
                 </a:solidFill>
@@ -16478,7 +16478,7 @@
               </a:spcAft>
             </a:pPr>
             <a:r>
-              <a:rPr sz="1600" b="1">
+              <a:rPr sz="1350" b="1">
                 <a:solidFill>
                   <a:srgbClr val="1B8A5A"/>
                 </a:solidFill>
@@ -16493,14 +16493,14 @@
                 <a:spcPct val="95000"/>
               </a:lnSpc>
               <a:spcBef>
-                <a:spcPts val="500"/>
-              </a:spcBef>
-              <a:spcAft>
-                <a:spcPts val="0"/>
-              </a:spcAft>
-            </a:pPr>
-            <a:r>
-              <a:rPr sz="1400" b="0">
+                <a:spcPts val="400"/>
+              </a:spcBef>
+              <a:spcAft>
+                <a:spcPts val="0"/>
+              </a:spcAft>
+            </a:pPr>
+            <a:r>
+              <a:rPr sz="1150" b="0">
                 <a:solidFill>
                   <a:srgbClr val="262B33"/>
                 </a:solidFill>
@@ -16535,7 +16535,7 @@
           <a:p>
             <a:pPr algn="r"/>
             <a:r>
-              <a:rPr sz="1200" b="1" u="sng">
+              <a:rPr sz="1050" b="1" u="sng">
                 <a:solidFill>
                   <a:srgbClr val="1B8A5A"/>
                 </a:solidFill>
@@ -16673,7 +16673,7 @@
               </a:spcAft>
             </a:pPr>
             <a:r>
-              <a:rPr sz="1600" b="1">
+              <a:rPr sz="1350" b="1">
                 <a:solidFill>
                   <a:srgbClr val="C77700"/>
                 </a:solidFill>
@@ -16688,14 +16688,14 @@
                 <a:spcPct val="95000"/>
               </a:lnSpc>
               <a:spcBef>
-                <a:spcPts val="500"/>
-              </a:spcBef>
-              <a:spcAft>
-                <a:spcPts val="0"/>
-              </a:spcAft>
-            </a:pPr>
-            <a:r>
-              <a:rPr sz="1400" b="0">
+                <a:spcPts val="400"/>
+              </a:spcBef>
+              <a:spcAft>
+                <a:spcPts val="0"/>
+              </a:spcAft>
+            </a:pPr>
+            <a:r>
+              <a:rPr sz="1150" b="0">
                 <a:solidFill>
                   <a:srgbClr val="262B33"/>
                 </a:solidFill>
@@ -16730,7 +16730,7 @@
           <a:p>
             <a:pPr algn="r"/>
             <a:r>
-              <a:rPr sz="1200" b="1" u="sng">
+              <a:rPr sz="1050" b="1" u="sng">
                 <a:solidFill>
                   <a:srgbClr val="C77700"/>
                 </a:solidFill>
@@ -16868,7 +16868,7 @@
               </a:spcAft>
             </a:pPr>
             <a:r>
-              <a:rPr sz="1600" b="1">
+              <a:rPr sz="1350" b="1">
                 <a:solidFill>
                   <a:srgbClr val="4B3F8C"/>
                 </a:solidFill>
@@ -16883,14 +16883,14 @@
                 <a:spcPct val="95000"/>
               </a:lnSpc>
               <a:spcBef>
-                <a:spcPts val="500"/>
-              </a:spcBef>
-              <a:spcAft>
-                <a:spcPts val="0"/>
-              </a:spcAft>
-            </a:pPr>
-            <a:r>
-              <a:rPr sz="1400" b="0">
+                <a:spcPts val="400"/>
+              </a:spcBef>
+              <a:spcAft>
+                <a:spcPts val="0"/>
+              </a:spcAft>
+            </a:pPr>
+            <a:r>
+              <a:rPr sz="1150" b="0">
                 <a:solidFill>
                   <a:srgbClr val="262B33"/>
                 </a:solidFill>
@@ -16925,7 +16925,7 @@
           <a:p>
             <a:pPr algn="r"/>
             <a:r>
-              <a:rPr sz="1200" b="1" u="sng">
+              <a:rPr sz="1050" b="1" u="sng">
                 <a:solidFill>
                   <a:srgbClr val="4B3F8C"/>
                 </a:solidFill>
@@ -17063,7 +17063,7 @@
               </a:spcAft>
             </a:pPr>
             <a:r>
-              <a:rPr sz="1600" b="1">
+              <a:rPr sz="1350" b="1">
                 <a:solidFill>
                   <a:srgbClr val="0E7C86"/>
                 </a:solidFill>
@@ -17078,14 +17078,14 @@
                 <a:spcPct val="95000"/>
               </a:lnSpc>
               <a:spcBef>
-                <a:spcPts val="500"/>
-              </a:spcBef>
-              <a:spcAft>
-                <a:spcPts val="0"/>
-              </a:spcAft>
-            </a:pPr>
-            <a:r>
-              <a:rPr sz="1400" b="0">
+                <a:spcPts val="400"/>
+              </a:spcBef>
+              <a:spcAft>
+                <a:spcPts val="0"/>
+              </a:spcAft>
+            </a:pPr>
+            <a:r>
+              <a:rPr sz="1150" b="0">
                 <a:solidFill>
                   <a:srgbClr val="262B33"/>
                 </a:solidFill>
@@ -17120,7 +17120,7 @@
           <a:p>
             <a:pPr algn="r"/>
             <a:r>
-              <a:rPr sz="1200" b="1" u="sng">
+              <a:rPr sz="1050" b="1" u="sng">
                 <a:solidFill>
                   <a:srgbClr val="0E7C86"/>
                 </a:solidFill>
@@ -17258,7 +17258,7 @@
               </a:spcAft>
             </a:pPr>
             <a:r>
-              <a:rPr sz="1600" b="1">
+              <a:rPr sz="1350" b="1">
                 <a:solidFill>
                   <a:srgbClr val="7A3E6B"/>
                 </a:solidFill>
@@ -17273,14 +17273,14 @@
                 <a:spcPct val="95000"/>
               </a:lnSpc>
               <a:spcBef>
-                <a:spcPts val="500"/>
-              </a:spcBef>
-              <a:spcAft>
-                <a:spcPts val="0"/>
-              </a:spcAft>
-            </a:pPr>
-            <a:r>
-              <a:rPr sz="1400" b="0">
+                <a:spcPts val="400"/>
+              </a:spcBef>
+              <a:spcAft>
+                <a:spcPts val="0"/>
+              </a:spcAft>
+            </a:pPr>
+            <a:r>
+              <a:rPr sz="1150" b="0">
                 <a:solidFill>
                   <a:srgbClr val="262B33"/>
                 </a:solidFill>
@@ -17316,7 +17316,7 @@
           <a:p>
             <a:pPr algn="r"/>
             <a:r>
-              <a:rPr sz="1200" b="1" u="sng">
+              <a:rPr sz="1050" b="1" u="sng">
                 <a:solidFill>
                   <a:srgbClr val="7A3E6B"/>
                 </a:solidFill>
@@ -17465,7 +17465,7 @@
           <a:p>
             <a:pPr algn="l"/>
             <a:r>
-              <a:rPr sz="1200" b="1" u="sng">
+              <a:rPr sz="1050" b="1" u="sng">
                 <a:solidFill>
                   <a:srgbClr val="1F497D"/>
                 </a:solidFill>
@@ -17501,7 +17501,7 @@
           <a:p>
             <a:pPr algn="l"/>
             <a:r>
-              <a:rPr sz="1200" b="1" u="sng">
+              <a:rPr sz="1050" b="1" u="sng">
                 <a:solidFill>
                   <a:srgbClr val="1B8A5A"/>
                 </a:solidFill>
@@ -17537,7 +17537,7 @@
           <a:p>
             <a:pPr algn="l"/>
             <a:r>
-              <a:rPr sz="1200" b="1" u="sng">
+              <a:rPr sz="1050" b="1" u="sng">
                 <a:solidFill>
                   <a:srgbClr val="4B3F8C"/>
                 </a:solidFill>
@@ -17573,7 +17573,7 @@
           <a:p>
             <a:pPr algn="l"/>
             <a:r>
-              <a:rPr sz="1200" b="1" u="sng">
+              <a:rPr sz="1050" b="1" u="sng">
                 <a:solidFill>
                   <a:srgbClr val="0E7C86"/>
                 </a:solidFill>
